--- a/runnerpub-proposal/러너펍_세일즈제안서_내일사장_202607.pptx
+++ b/runnerpub-proposal/러너펍_세일즈제안서_내일사장_202607.pptx
@@ -12,9 +12,10 @@
     <p:sldId id="260" r:id="rId6"/>
     <p:sldId id="261" r:id="rId7"/>
     <p:sldId id="262" r:id="rId8"/>
+    <p:sldId id="263" r:id="rId9"/>
   </p:sldIdLst>
   <p:notesMasterIdLst>
-    <p:notesMasterId r:id="rId9"/>
+    <p:notesMasterId r:id="rId10"/>
   </p:notesMasterIdLst>
   <p:sldSz cx="12192000" cy="6858000"/>
   <p:notesSz cx="6858000" cy="12192000"/>
@@ -1036,7 +1037,7 @@
           <a:p>
             <a:r>
               <a:rPr lang="en-US" dirty="0"/>
-              <a:t>조건만 확정되면 바로 가동할 수 있습니다. 본사 리스크는 0원입니다.</a:t>
+              <a:t>본사가 가장 먼저 하실 계산이 "1,500만원 받아서 1,000만원 주면 500만원밖에 안 남는다"일 겁니다. 맞습니다. 다만 그 500만원은 계약 시점에 이미 흑자라는 뜻이고, 본사 수익의 본체는 월 로열티입니다. 3년이면 5,900만원입니다.</a:t>
             </a:r>
             <a:endParaRPr lang="en-US" dirty="0"/>
           </a:p>
@@ -1060,6 +1061,94 @@
             <a:fld id="{F7021451-1387-4CA6-816F-3879F97B5CBC}" type="slidenum">
               <a:rPr lang="en-US"/>
               <a:t>7</a:t>
+            </a:fld>
+            <a:endParaRPr lang="en-US"/>
+          </a:p>
+        </p:txBody>
+      </p:sp>
+    </p:spTree>
+    <p:extLst>
+      <p:ext uri="{BB962C8B-B14F-4D97-AF65-F5344CB8AC3E}">
+        <p14:creationId xmlns:p14="http://schemas.microsoft.com/office/powerpoint/2010/main" val="1024086991"/>
+      </p:ext>
+    </p:extLst>
+  </p:cSld>
+  <p:clrMapOvr>
+    <a:masterClrMapping/>
+  </p:clrMapOvr>
+</p:notes>
+</file>
+
+<file path=ppt/notesSlides/notesSlide8.xml><?xml version="1.0" encoding="utf-8"?>
+<p:notes xmlns:a="http://schemas.openxmlformats.org/drawingml/2006/main" xmlns:r="http://schemas.openxmlformats.org/officeDocument/2006/relationships" xmlns:p="http://schemas.openxmlformats.org/presentationml/2006/main">
+  <p:cSld>
+    <p:spTree>
+      <p:nvGrpSpPr>
+        <p:cNvPr id="1" name=""/>
+        <p:cNvGrpSpPr/>
+        <p:nvPr/>
+      </p:nvGrpSpPr>
+      <p:grpSpPr>
+        <a:xfrm>
+          <a:off x="0" y="0"/>
+          <a:ext cx="0" cy="0"/>
+          <a:chOff x="0" y="0"/>
+          <a:chExt cx="0" cy="0"/>
+        </a:xfrm>
+      </p:grpSpPr>
+      <p:sp>
+        <p:nvSpPr>
+          <p:cNvPr id="2" name="Slide Image Placeholder 1"/>
+          <p:cNvSpPr>
+            <a:spLocks noGrp="1" noRot="1" noChangeAspect="1"/>
+          </p:cNvSpPr>
+          <p:nvPr>
+            <p:ph type="sldImg"/>
+          </p:nvPr>
+        </p:nvSpPr>
+        <p:spPr/>
+      </p:sp>
+      <p:sp>
+        <p:nvSpPr>
+          <p:cNvPr id="3" name="Notes Placeholder 2"/>
+          <p:cNvSpPr>
+            <a:spLocks noGrp="1"/>
+          </p:cNvSpPr>
+          <p:nvPr>
+            <p:ph type="body" idx="1"/>
+          </p:nvPr>
+        </p:nvSpPr>
+        <p:spPr/>
+        <p:txBody>
+          <a:bodyPr/>
+          <a:lstStyle/>
+          <a:p>
+            <a:r>
+              <a:rPr lang="en-US" dirty="0"/>
+              <a:t>조건만 확정되면 바로 가동할 수 있습니다. 본사 리스크는 0원입니다.</a:t>
+            </a:r>
+            <a:endParaRPr lang="en-US" dirty="0"/>
+          </a:p>
+        </p:txBody>
+      </p:sp>
+      <p:sp>
+        <p:nvSpPr>
+          <p:cNvPr id="4" name="Slide Number Placeholder 3"/>
+          <p:cNvSpPr>
+            <a:spLocks noGrp="1"/>
+          </p:cNvSpPr>
+          <p:nvPr>
+            <p:ph type="sldNum" sz="quarter" idx="10"/>
+          </p:nvPr>
+        </p:nvSpPr>
+        <p:spPr/>
+        <p:txBody>
+          <a:bodyPr/>
+          <a:lstStyle/>
+          <a:p>
+            <a:fld id="{F7021451-1387-4CA6-816F-3879F97B5CBC}" type="slidenum">
+              <a:rPr lang="en-US"/>
+              <a:t>8</a:t>
             </a:fld>
             <a:endParaRPr lang="en-US"/>
           </a:p>
@@ -10014,6 +10103,1520 @@
 <file path=ppt/slides/slide7.xml><?xml version="1.0" encoding="utf-8"?>
 <p:sld xmlns:a="http://schemas.openxmlformats.org/drawingml/2006/main" xmlns:r="http://schemas.openxmlformats.org/officeDocument/2006/relationships" xmlns:p="http://schemas.openxmlformats.org/presentationml/2006/main">
   <p:cSld name="Slide 7">
+    <p:spTree>
+      <p:nvGrpSpPr>
+        <p:cNvPr id="1" name=""/>
+        <p:cNvGrpSpPr/>
+        <p:nvPr/>
+      </p:nvGrpSpPr>
+      <p:grpSpPr>
+        <a:xfrm>
+          <a:off x="0" y="0"/>
+          <a:ext cx="0" cy="0"/>
+          <a:chOff x="0" y="0"/>
+          <a:chExt cx="0" cy="0"/>
+        </a:xfrm>
+      </p:grpSpPr>
+      <p:sp>
+        <p:nvSpPr>
+          <p:cNvPr id="2" name="Shape 0"/>
+          <p:cNvSpPr/>
+          <p:nvPr/>
+        </p:nvSpPr>
+        <p:spPr>
+          <a:xfrm>
+            <a:off x="566928" y="402336"/>
+            <a:ext cx="384048" cy="384048"/>
+          </a:xfrm>
+          <a:prstGeom prst="ellipse">
+            <a:avLst/>
+          </a:prstGeom>
+          <a:solidFill>
+            <a:srgbClr val="5B3DF5"/>
+          </a:solidFill>
+          <a:ln w="12700">
+            <a:solidFill>
+              <a:srgbClr val="5B3DF5"/>
+            </a:solidFill>
+            <a:prstDash val="solid"/>
+          </a:ln>
+        </p:spPr>
+      </p:sp>
+      <p:sp>
+        <p:nvSpPr>
+          <p:cNvPr id="3" name="Text 1"/>
+          <p:cNvSpPr/>
+          <p:nvPr/>
+        </p:nvSpPr>
+        <p:spPr>
+          <a:xfrm>
+            <a:off x="566928" y="402336"/>
+            <a:ext cx="384048" cy="384048"/>
+          </a:xfrm>
+          <a:prstGeom prst="rect">
+            <a:avLst/>
+          </a:prstGeom>
+          <a:noFill/>
+          <a:ln/>
+        </p:spPr>
+        <p:txBody>
+          <a:bodyPr wrap="square" lIns="0" tIns="0" rIns="0" bIns="0" rtlCol="0" anchor="ctr"/>
+          <a:lstStyle/>
+          <a:p>
+            <a:pPr algn="ctr" indent="0" marL="0">
+              <a:buNone/>
+            </a:pPr>
+            <a:r>
+              <a:rPr lang="en-US" sz="1100" b="1" dirty="0">
+                <a:solidFill>
+                  <a:srgbClr val="FFFFFF"/>
+                </a:solidFill>
+                <a:latin typeface="맑은 고딕" pitchFamily="34" charset="0"/>
+                <a:ea typeface="맑은 고딕" pitchFamily="34" charset="-122"/>
+                <a:cs typeface="맑은 고딕" pitchFamily="34" charset="-120"/>
+              </a:rPr>
+              <a:t>06</a:t>
+            </a:r>
+            <a:endParaRPr lang="en-US" sz="1100" dirty="0"/>
+          </a:p>
+        </p:txBody>
+      </p:sp>
+      <p:sp>
+        <p:nvSpPr>
+          <p:cNvPr id="4" name="Text 2"/>
+          <p:cNvSpPr/>
+          <p:nvPr/>
+        </p:nvSpPr>
+        <p:spPr>
+          <a:xfrm>
+            <a:off x="1115568" y="402336"/>
+            <a:ext cx="5486400" cy="384048"/>
+          </a:xfrm>
+          <a:prstGeom prst="rect">
+            <a:avLst/>
+          </a:prstGeom>
+          <a:noFill/>
+          <a:ln/>
+        </p:spPr>
+        <p:txBody>
+          <a:bodyPr wrap="square" lIns="0" tIns="0" rIns="0" bIns="0" rtlCol="0" anchor="ctr"/>
+          <a:lstStyle/>
+          <a:p>
+            <a:pPr indent="0" marL="0">
+              <a:buNone/>
+            </a:pPr>
+            <a:r>
+              <a:rPr lang="en-US" sz="1100" b="1" spc="220" kern="0" dirty="0">
+                <a:solidFill>
+                  <a:srgbClr val="6E6885"/>
+                </a:solidFill>
+                <a:latin typeface="맑은 고딕" pitchFamily="34" charset="0"/>
+                <a:ea typeface="맑은 고딕" pitchFamily="34" charset="-122"/>
+                <a:cs typeface="맑은 고딕" pitchFamily="34" charset="-120"/>
+              </a:rPr>
+              <a:t>RETURN</a:t>
+            </a:r>
+            <a:endParaRPr lang="en-US" sz="1100" dirty="0"/>
+          </a:p>
+        </p:txBody>
+      </p:sp>
+      <p:sp>
+        <p:nvSpPr>
+          <p:cNvPr id="5" name="Text 3"/>
+          <p:cNvSpPr/>
+          <p:nvPr/>
+        </p:nvSpPr>
+        <p:spPr>
+          <a:xfrm>
+            <a:off x="566928" y="960120"/>
+            <a:ext cx="11057839" cy="914400"/>
+          </a:xfrm>
+          <a:prstGeom prst="rect">
+            <a:avLst/>
+          </a:prstGeom>
+          <a:noFill/>
+          <a:ln/>
+        </p:spPr>
+        <p:txBody>
+          <a:bodyPr wrap="square" lIns="0" tIns="0" rIns="0" bIns="0" rtlCol="0" anchor="t"/>
+          <a:lstStyle/>
+          <a:p>
+            <a:pPr indent="0" marL="0">
+              <a:lnSpc>
+                <a:spcPts val="3828"/>
+              </a:lnSpc>
+              <a:buNone/>
+            </a:pPr>
+            <a:r>
+              <a:rPr lang="en-US" sz="2900" b="1" dirty="0">
+                <a:solidFill>
+                  <a:srgbClr val="12101F"/>
+                </a:solidFill>
+                <a:latin typeface="맑은 고딕" pitchFamily="34" charset="0"/>
+                <a:ea typeface="맑은 고딕" pitchFamily="34" charset="-122"/>
+                <a:cs typeface="맑은 고딕" pitchFamily="34" charset="-120"/>
+              </a:rPr>
+              <a:t>성공보수는 </a:t>
+            </a:r>
+            <a:pPr indent="0" marL="0">
+              <a:lnSpc>
+                <a:spcPts val="3828"/>
+              </a:lnSpc>
+              <a:buNone/>
+            </a:pPr>
+            <a:r>
+              <a:rPr lang="en-US" sz="2900" b="1" dirty="0">
+                <a:solidFill>
+                  <a:srgbClr val="5B3DF5"/>
+                </a:solidFill>
+                <a:latin typeface="맑은 고딕" pitchFamily="34" charset="0"/>
+                <a:ea typeface="맑은 고딕" pitchFamily="34" charset="-122"/>
+                <a:cs typeface="맑은 고딕" pitchFamily="34" charset="-120"/>
+              </a:rPr>
+              <a:t>가맹비 범위 안에서</a:t>
+            </a:r>
+            <a:pPr indent="0" marL="0">
+              <a:lnSpc>
+                <a:spcPts val="3828"/>
+              </a:lnSpc>
+              <a:buNone/>
+            </a:pPr>
+            <a:r>
+              <a:rPr lang="en-US" sz="2900" b="1" dirty="0">
+                <a:solidFill>
+                  <a:srgbClr val="12101F"/>
+                </a:solidFill>
+                <a:latin typeface="맑은 고딕" pitchFamily="34" charset="0"/>
+                <a:ea typeface="맑은 고딕" pitchFamily="34" charset="-122"/>
+                <a:cs typeface="맑은 고딕" pitchFamily="34" charset="-120"/>
+              </a:rPr>
+              <a:t> 정산됩니다.</a:t>
+            </a:r>
+            <a:endParaRPr lang="en-US" sz="2900" dirty="0"/>
+          </a:p>
+        </p:txBody>
+      </p:sp>
+      <p:sp>
+        <p:nvSpPr>
+          <p:cNvPr id="6" name="Text 4"/>
+          <p:cNvSpPr/>
+          <p:nvPr/>
+        </p:nvSpPr>
+        <p:spPr>
+          <a:xfrm>
+            <a:off x="566928" y="1783080"/>
+            <a:ext cx="9601200" cy="310896"/>
+          </a:xfrm>
+          <a:prstGeom prst="rect">
+            <a:avLst/>
+          </a:prstGeom>
+          <a:noFill/>
+          <a:ln/>
+        </p:spPr>
+        <p:txBody>
+          <a:bodyPr wrap="square" lIns="0" tIns="0" rIns="0" bIns="0" rtlCol="0" anchor="ctr"/>
+          <a:lstStyle/>
+          <a:p>
+            <a:pPr indent="0" marL="0">
+              <a:buNone/>
+            </a:pPr>
+            <a:r>
+              <a:rPr lang="en-US" sz="1150" dirty="0">
+                <a:solidFill>
+                  <a:srgbClr val="3A3550"/>
+                </a:solidFill>
+                <a:latin typeface="맑은 고딕" pitchFamily="34" charset="0"/>
+                <a:ea typeface="맑은 고딕" pitchFamily="34" charset="-122"/>
+                <a:cs typeface="맑은 고딕" pitchFamily="34" charset="-120"/>
+              </a:rPr>
+              <a:t>본사가 추가로 지출하는 돈이 아닙니다. 계약 시점부터 이미 흑자이고, 이후 로열티는 전액 순증입니다.</a:t>
+            </a:r>
+            <a:endParaRPr lang="en-US" sz="1150" dirty="0"/>
+          </a:p>
+        </p:txBody>
+      </p:sp>
+      <p:sp>
+        <p:nvSpPr>
+          <p:cNvPr id="7" name="Shape 5"/>
+          <p:cNvSpPr/>
+          <p:nvPr/>
+        </p:nvSpPr>
+        <p:spPr>
+          <a:xfrm>
+            <a:off x="566928" y="2286000"/>
+            <a:ext cx="4160520" cy="2962656"/>
+          </a:xfrm>
+          <a:prstGeom prst="roundRect">
+            <a:avLst>
+              <a:gd name="adj" fmla="val 1852"/>
+            </a:avLst>
+          </a:prstGeom>
+          <a:solidFill>
+            <a:srgbClr val="FFFFFF"/>
+          </a:solidFill>
+          <a:ln w="12700">
+            <a:solidFill>
+              <a:srgbClr val="E3DFF2"/>
+            </a:solidFill>
+            <a:prstDash val="solid"/>
+          </a:ln>
+        </p:spPr>
+      </p:sp>
+      <p:sp>
+        <p:nvSpPr>
+          <p:cNvPr id="8" name="Text 6"/>
+          <p:cNvSpPr/>
+          <p:nvPr/>
+        </p:nvSpPr>
+        <p:spPr>
+          <a:xfrm>
+            <a:off x="896112" y="2505456"/>
+            <a:ext cx="3108960" cy="237744"/>
+          </a:xfrm>
+          <a:prstGeom prst="rect">
+            <a:avLst/>
+          </a:prstGeom>
+          <a:noFill/>
+          <a:ln/>
+        </p:spPr>
+        <p:txBody>
+          <a:bodyPr wrap="square" lIns="0" tIns="0" rIns="0" bIns="0" rtlCol="0" anchor="ctr"/>
+          <a:lstStyle/>
+          <a:p>
+            <a:pPr indent="0" marL="0">
+              <a:buNone/>
+            </a:pPr>
+            <a:r>
+              <a:rPr lang="en-US" sz="900" b="1" spc="100" kern="0" dirty="0">
+                <a:solidFill>
+                  <a:srgbClr val="5B3DF5"/>
+                </a:solidFill>
+                <a:latin typeface="맑은 고딕" pitchFamily="34" charset="0"/>
+                <a:ea typeface="맑은 고딕" pitchFamily="34" charset="-122"/>
+                <a:cs typeface="맑은 고딕" pitchFamily="34" charset="-120"/>
+              </a:rPr>
+              <a:t>계약 1건 · 계약 시점</a:t>
+            </a:r>
+            <a:endParaRPr lang="en-US" sz="900" dirty="0"/>
+          </a:p>
+        </p:txBody>
+      </p:sp>
+      <p:sp>
+        <p:nvSpPr>
+          <p:cNvPr id="9" name="Text 7"/>
+          <p:cNvSpPr/>
+          <p:nvPr/>
+        </p:nvSpPr>
+        <p:spPr>
+          <a:xfrm>
+            <a:off x="896112" y="2889504"/>
+            <a:ext cx="2377440" cy="274320"/>
+          </a:xfrm>
+          <a:prstGeom prst="rect">
+            <a:avLst/>
+          </a:prstGeom>
+          <a:noFill/>
+          <a:ln/>
+        </p:spPr>
+        <p:txBody>
+          <a:bodyPr wrap="square" lIns="0" tIns="0" rIns="0" bIns="0" rtlCol="0" anchor="ctr"/>
+          <a:lstStyle/>
+          <a:p>
+            <a:pPr indent="0" marL="0">
+              <a:buNone/>
+            </a:pPr>
+            <a:r>
+              <a:rPr lang="en-US" sz="1050" dirty="0">
+                <a:solidFill>
+                  <a:srgbClr val="3A3550"/>
+                </a:solidFill>
+                <a:latin typeface="맑은 고딕" pitchFamily="34" charset="0"/>
+                <a:ea typeface="맑은 고딕" pitchFamily="34" charset="-122"/>
+                <a:cs typeface="맑은 고딕" pitchFamily="34" charset="-120"/>
+              </a:rPr>
+              <a:t>가맹비 (본사 수취)</a:t>
+            </a:r>
+            <a:endParaRPr lang="en-US" sz="1050" dirty="0"/>
+          </a:p>
+        </p:txBody>
+      </p:sp>
+      <p:sp>
+        <p:nvSpPr>
+          <p:cNvPr id="10" name="Text 8"/>
+          <p:cNvSpPr/>
+          <p:nvPr/>
+        </p:nvSpPr>
+        <p:spPr>
+          <a:xfrm>
+            <a:off x="3218688" y="2889504"/>
+            <a:ext cx="1280160" cy="274320"/>
+          </a:xfrm>
+          <a:prstGeom prst="rect">
+            <a:avLst/>
+          </a:prstGeom>
+          <a:noFill/>
+          <a:ln/>
+        </p:spPr>
+        <p:txBody>
+          <a:bodyPr wrap="square" lIns="0" tIns="0" rIns="0" bIns="0" rtlCol="0" anchor="ctr"/>
+          <a:lstStyle/>
+          <a:p>
+            <a:pPr algn="r" indent="0" marL="0">
+              <a:buNone/>
+            </a:pPr>
+            <a:r>
+              <a:rPr lang="en-US" sz="1350" b="1" dirty="0">
+                <a:solidFill>
+                  <a:srgbClr val="12101F"/>
+                </a:solidFill>
+                <a:latin typeface="맑은 고딕" pitchFamily="34" charset="0"/>
+                <a:ea typeface="맑은 고딕" pitchFamily="34" charset="-122"/>
+                <a:cs typeface="맑은 고딕" pitchFamily="34" charset="-120"/>
+              </a:rPr>
+              <a:t>+1,500</a:t>
+            </a:r>
+            <a:pPr algn="r" indent="0" marL="0">
+              <a:buNone/>
+            </a:pPr>
+            <a:r>
+              <a:rPr lang="en-US" sz="950" dirty="0">
+                <a:solidFill>
+                  <a:srgbClr val="6E6885"/>
+                </a:solidFill>
+                <a:latin typeface="맑은 고딕" pitchFamily="34" charset="0"/>
+                <a:ea typeface="맑은 고딕" pitchFamily="34" charset="-122"/>
+                <a:cs typeface="맑은 고딕" pitchFamily="34" charset="-120"/>
+              </a:rPr>
+              <a:t> 만원</a:t>
+            </a:r>
+            <a:endParaRPr lang="en-US" sz="1350" dirty="0"/>
+          </a:p>
+        </p:txBody>
+      </p:sp>
+      <p:sp>
+        <p:nvSpPr>
+          <p:cNvPr id="11" name="Text 9"/>
+          <p:cNvSpPr/>
+          <p:nvPr/>
+        </p:nvSpPr>
+        <p:spPr>
+          <a:xfrm>
+            <a:off x="896112" y="3310128"/>
+            <a:ext cx="2377440" cy="274320"/>
+          </a:xfrm>
+          <a:prstGeom prst="rect">
+            <a:avLst/>
+          </a:prstGeom>
+          <a:noFill/>
+          <a:ln/>
+        </p:spPr>
+        <p:txBody>
+          <a:bodyPr wrap="square" lIns="0" tIns="0" rIns="0" bIns="0" rtlCol="0" anchor="ctr"/>
+          <a:lstStyle/>
+          <a:p>
+            <a:pPr indent="0" marL="0">
+              <a:buNone/>
+            </a:pPr>
+            <a:r>
+              <a:rPr lang="en-US" sz="1050" dirty="0">
+                <a:solidFill>
+                  <a:srgbClr val="3A3550"/>
+                </a:solidFill>
+                <a:latin typeface="맑은 고딕" pitchFamily="34" charset="0"/>
+                <a:ea typeface="맑은 고딕" pitchFamily="34" charset="-122"/>
+                <a:cs typeface="맑은 고딕" pitchFamily="34" charset="-120"/>
+              </a:rPr>
+              <a:t>성공보수 (내일사장)</a:t>
+            </a:r>
+            <a:endParaRPr lang="en-US" sz="1050" dirty="0"/>
+          </a:p>
+        </p:txBody>
+      </p:sp>
+      <p:sp>
+        <p:nvSpPr>
+          <p:cNvPr id="12" name="Text 10"/>
+          <p:cNvSpPr/>
+          <p:nvPr/>
+        </p:nvSpPr>
+        <p:spPr>
+          <a:xfrm>
+            <a:off x="3218688" y="3310128"/>
+            <a:ext cx="1280160" cy="274320"/>
+          </a:xfrm>
+          <a:prstGeom prst="rect">
+            <a:avLst/>
+          </a:prstGeom>
+          <a:noFill/>
+          <a:ln/>
+        </p:spPr>
+        <p:txBody>
+          <a:bodyPr wrap="square" lIns="0" tIns="0" rIns="0" bIns="0" rtlCol="0" anchor="ctr"/>
+          <a:lstStyle/>
+          <a:p>
+            <a:pPr algn="r" indent="0" marL="0">
+              <a:buNone/>
+            </a:pPr>
+            <a:r>
+              <a:rPr lang="en-US" sz="1350" b="1" dirty="0">
+                <a:solidFill>
+                  <a:srgbClr val="6E6885"/>
+                </a:solidFill>
+                <a:latin typeface="맑은 고딕" pitchFamily="34" charset="0"/>
+                <a:ea typeface="맑은 고딕" pitchFamily="34" charset="-122"/>
+                <a:cs typeface="맑은 고딕" pitchFamily="34" charset="-120"/>
+              </a:rPr>
+              <a:t>−1,000</a:t>
+            </a:r>
+            <a:pPr algn="r" indent="0" marL="0">
+              <a:buNone/>
+            </a:pPr>
+            <a:r>
+              <a:rPr lang="en-US" sz="950" dirty="0">
+                <a:solidFill>
+                  <a:srgbClr val="6E6885"/>
+                </a:solidFill>
+                <a:latin typeface="맑은 고딕" pitchFamily="34" charset="0"/>
+                <a:ea typeface="맑은 고딕" pitchFamily="34" charset="-122"/>
+                <a:cs typeface="맑은 고딕" pitchFamily="34" charset="-120"/>
+              </a:rPr>
+              <a:t> 만원</a:t>
+            </a:r>
+            <a:endParaRPr lang="en-US" sz="1350" dirty="0"/>
+          </a:p>
+        </p:txBody>
+      </p:sp>
+      <p:sp>
+        <p:nvSpPr>
+          <p:cNvPr id="13" name="Shape 11"/>
+          <p:cNvSpPr/>
+          <p:nvPr/>
+        </p:nvSpPr>
+        <p:spPr>
+          <a:xfrm>
+            <a:off x="896112" y="3767328"/>
+            <a:ext cx="3602736" cy="10973"/>
+          </a:xfrm>
+          <a:prstGeom prst="rect">
+            <a:avLst/>
+          </a:prstGeom>
+          <a:solidFill>
+            <a:srgbClr val="E3DFF2"/>
+          </a:solidFill>
+          <a:ln w="12700">
+            <a:solidFill>
+              <a:srgbClr val="333333"/>
+            </a:solidFill>
+            <a:prstDash val="solid"/>
+          </a:ln>
+        </p:spPr>
+      </p:sp>
+      <p:sp>
+        <p:nvSpPr>
+          <p:cNvPr id="14" name="Text 12"/>
+          <p:cNvSpPr/>
+          <p:nvPr/>
+        </p:nvSpPr>
+        <p:spPr>
+          <a:xfrm>
+            <a:off x="896112" y="3931920"/>
+            <a:ext cx="2377440" cy="274320"/>
+          </a:xfrm>
+          <a:prstGeom prst="rect">
+            <a:avLst/>
+          </a:prstGeom>
+          <a:noFill/>
+          <a:ln/>
+        </p:spPr>
+        <p:txBody>
+          <a:bodyPr wrap="square" lIns="0" tIns="0" rIns="0" bIns="0" rtlCol="0" anchor="ctr"/>
+          <a:lstStyle/>
+          <a:p>
+            <a:pPr indent="0" marL="0">
+              <a:buNone/>
+            </a:pPr>
+            <a:r>
+              <a:rPr lang="en-US" sz="1050" b="1" dirty="0">
+                <a:solidFill>
+                  <a:srgbClr val="12101F"/>
+                </a:solidFill>
+                <a:latin typeface="맑은 고딕" pitchFamily="34" charset="0"/>
+                <a:ea typeface="맑은 고딕" pitchFamily="34" charset="-122"/>
+                <a:cs typeface="맑은 고딕" pitchFamily="34" charset="-120"/>
+              </a:rPr>
+              <a:t>계약 시점 본사 순수익</a:t>
+            </a:r>
+            <a:endParaRPr lang="en-US" sz="1050" dirty="0"/>
+          </a:p>
+        </p:txBody>
+      </p:sp>
+      <p:sp>
+        <p:nvSpPr>
+          <p:cNvPr id="15" name="Text 13"/>
+          <p:cNvSpPr/>
+          <p:nvPr/>
+        </p:nvSpPr>
+        <p:spPr>
+          <a:xfrm>
+            <a:off x="2944368" y="3913632"/>
+            <a:ext cx="1554480" cy="310896"/>
+          </a:xfrm>
+          <a:prstGeom prst="rect">
+            <a:avLst/>
+          </a:prstGeom>
+          <a:noFill/>
+          <a:ln/>
+        </p:spPr>
+        <p:txBody>
+          <a:bodyPr wrap="square" lIns="0" tIns="0" rIns="0" bIns="0" rtlCol="0" anchor="ctr"/>
+          <a:lstStyle/>
+          <a:p>
+            <a:pPr algn="r" indent="0" marL="0">
+              <a:buNone/>
+            </a:pPr>
+            <a:r>
+              <a:rPr lang="en-US" sz="1900" b="1" dirty="0">
+                <a:solidFill>
+                  <a:srgbClr val="241A5C"/>
+                </a:solidFill>
+                <a:latin typeface="맑은 고딕" pitchFamily="34" charset="0"/>
+                <a:ea typeface="맑은 고딕" pitchFamily="34" charset="-122"/>
+                <a:cs typeface="맑은 고딕" pitchFamily="34" charset="-120"/>
+              </a:rPr>
+              <a:t>+500</a:t>
+            </a:r>
+            <a:pPr algn="r" indent="0" marL="0">
+              <a:buNone/>
+            </a:pPr>
+            <a:r>
+              <a:rPr lang="en-US" sz="1050" b="1" dirty="0">
+                <a:solidFill>
+                  <a:srgbClr val="B4832B"/>
+                </a:solidFill>
+                <a:latin typeface="맑은 고딕" pitchFamily="34" charset="0"/>
+                <a:ea typeface="맑은 고딕" pitchFamily="34" charset="-122"/>
+                <a:cs typeface="맑은 고딕" pitchFamily="34" charset="-120"/>
+              </a:rPr>
+              <a:t> 만원</a:t>
+            </a:r>
+            <a:endParaRPr lang="en-US" sz="1900" dirty="0"/>
+          </a:p>
+        </p:txBody>
+      </p:sp>
+      <p:sp>
+        <p:nvSpPr>
+          <p:cNvPr id="16" name="Text 14"/>
+          <p:cNvSpPr/>
+          <p:nvPr/>
+        </p:nvSpPr>
+        <p:spPr>
+          <a:xfrm>
+            <a:off x="896112" y="4407408"/>
+            <a:ext cx="3602736" cy="548640"/>
+          </a:xfrm>
+          <a:prstGeom prst="rect">
+            <a:avLst/>
+          </a:prstGeom>
+          <a:noFill/>
+          <a:ln/>
+        </p:spPr>
+        <p:txBody>
+          <a:bodyPr wrap="square" lIns="0" tIns="0" rIns="0" bIns="0" rtlCol="0" anchor="ctr"/>
+          <a:lstStyle/>
+          <a:p>
+            <a:pPr indent="0" marL="0">
+              <a:lnSpc>
+                <a:spcPts val="1450"/>
+              </a:lnSpc>
+              <a:buNone/>
+            </a:pPr>
+            <a:r>
+              <a:rPr lang="en-US" sz="920" dirty="0">
+                <a:solidFill>
+                  <a:srgbClr val="6E6885"/>
+                </a:solidFill>
+                <a:latin typeface="맑은 고딕" pitchFamily="34" charset="0"/>
+                <a:ea typeface="맑은 고딕" pitchFamily="34" charset="-122"/>
+                <a:cs typeface="맑은 고딕" pitchFamily="34" charset="-120"/>
+              </a:rPr>
+              <a:t>성공보수를 지급하고도 계약 즉시 흑자입니다. 본사가 별도 예산을 편성할 필요가 없습니다.</a:t>
+            </a:r>
+            <a:endParaRPr lang="en-US" sz="920" dirty="0"/>
+          </a:p>
+        </p:txBody>
+      </p:sp>
+      <p:sp>
+        <p:nvSpPr>
+          <p:cNvPr id="17" name="Text 15"/>
+          <p:cNvSpPr/>
+          <p:nvPr/>
+        </p:nvSpPr>
+        <p:spPr>
+          <a:xfrm>
+            <a:off x="5047488" y="2286000"/>
+            <a:ext cx="6577279" cy="256032"/>
+          </a:xfrm>
+          <a:prstGeom prst="rect">
+            <a:avLst/>
+          </a:prstGeom>
+          <a:noFill/>
+          <a:ln/>
+        </p:spPr>
+        <p:txBody>
+          <a:bodyPr wrap="square" lIns="0" tIns="0" rIns="0" bIns="0" rtlCol="0" anchor="ctr"/>
+          <a:lstStyle/>
+          <a:p>
+            <a:pPr indent="0" marL="0">
+              <a:buNone/>
+            </a:pPr>
+            <a:r>
+              <a:rPr lang="en-US" sz="900" b="1" spc="120" kern="0" dirty="0">
+                <a:solidFill>
+                  <a:srgbClr val="6E6885"/>
+                </a:solidFill>
+                <a:latin typeface="맑은 고딕" pitchFamily="34" charset="0"/>
+                <a:ea typeface="맑은 고딕" pitchFamily="34" charset="-122"/>
+                <a:cs typeface="맑은 고딕" pitchFamily="34" charset="-120"/>
+              </a:rPr>
+              <a:t>이후 누적 본사 수익 (월 로열티 150만원 반영)</a:t>
+            </a:r>
+            <a:endParaRPr lang="en-US" sz="900" dirty="0"/>
+          </a:p>
+        </p:txBody>
+      </p:sp>
+      <p:sp>
+        <p:nvSpPr>
+          <p:cNvPr id="18" name="Text 16"/>
+          <p:cNvSpPr/>
+          <p:nvPr/>
+        </p:nvSpPr>
+        <p:spPr>
+          <a:xfrm>
+            <a:off x="5047488" y="2724912"/>
+            <a:ext cx="914400" cy="365760"/>
+          </a:xfrm>
+          <a:prstGeom prst="rect">
+            <a:avLst/>
+          </a:prstGeom>
+          <a:noFill/>
+          <a:ln/>
+        </p:spPr>
+        <p:txBody>
+          <a:bodyPr wrap="square" lIns="0" tIns="0" rIns="0" bIns="0" rtlCol="0" anchor="ctr"/>
+          <a:lstStyle/>
+          <a:p>
+            <a:pPr indent="0" marL="0">
+              <a:buNone/>
+            </a:pPr>
+            <a:r>
+              <a:rPr lang="en-US" sz="960" b="1" dirty="0">
+                <a:solidFill>
+                  <a:srgbClr val="3A3550"/>
+                </a:solidFill>
+                <a:latin typeface="맑은 고딕" pitchFamily="34" charset="0"/>
+                <a:ea typeface="맑은 고딕" pitchFamily="34" charset="-122"/>
+                <a:cs typeface="맑은 고딕" pitchFamily="34" charset="-120"/>
+              </a:rPr>
+              <a:t>계약 시점</a:t>
+            </a:r>
+            <a:endParaRPr lang="en-US" sz="960" dirty="0"/>
+          </a:p>
+        </p:txBody>
+      </p:sp>
+      <p:sp>
+        <p:nvSpPr>
+          <p:cNvPr id="19" name="Shape 17"/>
+          <p:cNvSpPr/>
+          <p:nvPr/>
+        </p:nvSpPr>
+        <p:spPr>
+          <a:xfrm>
+            <a:off x="6007608" y="2807208"/>
+            <a:ext cx="4428439" cy="201168"/>
+          </a:xfrm>
+          <a:prstGeom prst="roundRect">
+            <a:avLst>
+              <a:gd name="adj" fmla="val 9091"/>
+            </a:avLst>
+          </a:prstGeom>
+          <a:solidFill>
+            <a:srgbClr val="F6F4FC"/>
+          </a:solidFill>
+          <a:ln w="12700">
+            <a:solidFill>
+              <a:srgbClr val="F6F4FC"/>
+            </a:solidFill>
+            <a:prstDash val="solid"/>
+          </a:ln>
+        </p:spPr>
+      </p:sp>
+      <p:sp>
+        <p:nvSpPr>
+          <p:cNvPr id="20" name="Shape 18"/>
+          <p:cNvSpPr/>
+          <p:nvPr/>
+        </p:nvSpPr>
+        <p:spPr>
+          <a:xfrm>
+            <a:off x="6007608" y="2807208"/>
+            <a:ext cx="375291" cy="201168"/>
+          </a:xfrm>
+          <a:prstGeom prst="roundRect">
+            <a:avLst>
+              <a:gd name="adj" fmla="val 9091"/>
+            </a:avLst>
+          </a:prstGeom>
+          <a:solidFill>
+            <a:srgbClr val="5B3DF5"/>
+          </a:solidFill>
+          <a:ln w="12700">
+            <a:solidFill>
+              <a:srgbClr val="333333"/>
+            </a:solidFill>
+            <a:prstDash val="solid"/>
+          </a:ln>
+        </p:spPr>
+      </p:sp>
+      <p:sp>
+        <p:nvSpPr>
+          <p:cNvPr id="21" name="Text 19"/>
+          <p:cNvSpPr/>
+          <p:nvPr/>
+        </p:nvSpPr>
+        <p:spPr>
+          <a:xfrm>
+            <a:off x="10481767" y="2724912"/>
+            <a:ext cx="1143000" cy="365760"/>
+          </a:xfrm>
+          <a:prstGeom prst="rect">
+            <a:avLst/>
+          </a:prstGeom>
+          <a:noFill/>
+          <a:ln/>
+        </p:spPr>
+        <p:txBody>
+          <a:bodyPr wrap="square" lIns="0" tIns="0" rIns="0" bIns="0" rtlCol="0" anchor="ctr"/>
+          <a:lstStyle/>
+          <a:p>
+            <a:pPr algn="r" indent="0" marL="0">
+              <a:buNone/>
+            </a:pPr>
+            <a:r>
+              <a:rPr lang="en-US" sz="1250" b="1" dirty="0">
+                <a:solidFill>
+                  <a:srgbClr val="12101F"/>
+                </a:solidFill>
+                <a:latin typeface="맑은 고딕" pitchFamily="34" charset="0"/>
+                <a:ea typeface="맑은 고딕" pitchFamily="34" charset="-122"/>
+                <a:cs typeface="맑은 고딕" pitchFamily="34" charset="-120"/>
+              </a:rPr>
+              <a:t>500</a:t>
+            </a:r>
+            <a:pPr algn="r" indent="0" marL="0">
+              <a:buNone/>
+            </a:pPr>
+            <a:r>
+              <a:rPr lang="en-US" sz="880" dirty="0">
+                <a:solidFill>
+                  <a:srgbClr val="6E6885"/>
+                </a:solidFill>
+                <a:latin typeface="맑은 고딕" pitchFamily="34" charset="0"/>
+                <a:ea typeface="맑은 고딕" pitchFamily="34" charset="-122"/>
+                <a:cs typeface="맑은 고딕" pitchFamily="34" charset="-120"/>
+              </a:rPr>
+              <a:t> 만원</a:t>
+            </a:r>
+            <a:endParaRPr lang="en-US" sz="1250" dirty="0"/>
+          </a:p>
+        </p:txBody>
+      </p:sp>
+      <p:sp>
+        <p:nvSpPr>
+          <p:cNvPr id="22" name="Text 20"/>
+          <p:cNvSpPr/>
+          <p:nvPr/>
+        </p:nvSpPr>
+        <p:spPr>
+          <a:xfrm>
+            <a:off x="5047488" y="3328416"/>
+            <a:ext cx="914400" cy="365760"/>
+          </a:xfrm>
+          <a:prstGeom prst="rect">
+            <a:avLst/>
+          </a:prstGeom>
+          <a:noFill/>
+          <a:ln/>
+        </p:spPr>
+        <p:txBody>
+          <a:bodyPr wrap="square" lIns="0" tIns="0" rIns="0" bIns="0" rtlCol="0" anchor="ctr"/>
+          <a:lstStyle/>
+          <a:p>
+            <a:pPr indent="0" marL="0">
+              <a:buNone/>
+            </a:pPr>
+            <a:r>
+              <a:rPr lang="en-US" sz="960" b="1" dirty="0">
+                <a:solidFill>
+                  <a:srgbClr val="3A3550"/>
+                </a:solidFill>
+                <a:latin typeface="맑은 고딕" pitchFamily="34" charset="0"/>
+                <a:ea typeface="맑은 고딕" pitchFamily="34" charset="-122"/>
+                <a:cs typeface="맑은 고딕" pitchFamily="34" charset="-120"/>
+              </a:rPr>
+              <a:t>12개월</a:t>
+            </a:r>
+            <a:endParaRPr lang="en-US" sz="960" dirty="0"/>
+          </a:p>
+        </p:txBody>
+      </p:sp>
+      <p:sp>
+        <p:nvSpPr>
+          <p:cNvPr id="23" name="Shape 21"/>
+          <p:cNvSpPr/>
+          <p:nvPr/>
+        </p:nvSpPr>
+        <p:spPr>
+          <a:xfrm>
+            <a:off x="6007608" y="3410712"/>
+            <a:ext cx="4428439" cy="201168"/>
+          </a:xfrm>
+          <a:prstGeom prst="roundRect">
+            <a:avLst>
+              <a:gd name="adj" fmla="val 9091"/>
+            </a:avLst>
+          </a:prstGeom>
+          <a:solidFill>
+            <a:srgbClr val="F6F4FC"/>
+          </a:solidFill>
+          <a:ln w="12700">
+            <a:solidFill>
+              <a:srgbClr val="F6F4FC"/>
+            </a:solidFill>
+            <a:prstDash val="solid"/>
+          </a:ln>
+        </p:spPr>
+      </p:sp>
+      <p:sp>
+        <p:nvSpPr>
+          <p:cNvPr id="24" name="Shape 22"/>
+          <p:cNvSpPr/>
+          <p:nvPr/>
+        </p:nvSpPr>
+        <p:spPr>
+          <a:xfrm>
+            <a:off x="6007608" y="3410712"/>
+            <a:ext cx="1726341" cy="201168"/>
+          </a:xfrm>
+          <a:prstGeom prst="roundRect">
+            <a:avLst>
+              <a:gd name="adj" fmla="val 9091"/>
+            </a:avLst>
+          </a:prstGeom>
+          <a:solidFill>
+            <a:srgbClr val="5B3DF5"/>
+          </a:solidFill>
+          <a:ln w="12700">
+            <a:solidFill>
+              <a:srgbClr val="333333"/>
+            </a:solidFill>
+            <a:prstDash val="solid"/>
+          </a:ln>
+        </p:spPr>
+      </p:sp>
+      <p:sp>
+        <p:nvSpPr>
+          <p:cNvPr id="25" name="Text 23"/>
+          <p:cNvSpPr/>
+          <p:nvPr/>
+        </p:nvSpPr>
+        <p:spPr>
+          <a:xfrm>
+            <a:off x="10481767" y="3328416"/>
+            <a:ext cx="1143000" cy="365760"/>
+          </a:xfrm>
+          <a:prstGeom prst="rect">
+            <a:avLst/>
+          </a:prstGeom>
+          <a:noFill/>
+          <a:ln/>
+        </p:spPr>
+        <p:txBody>
+          <a:bodyPr wrap="square" lIns="0" tIns="0" rIns="0" bIns="0" rtlCol="0" anchor="ctr"/>
+          <a:lstStyle/>
+          <a:p>
+            <a:pPr algn="r" indent="0" marL="0">
+              <a:buNone/>
+            </a:pPr>
+            <a:r>
+              <a:rPr lang="en-US" sz="1250" b="1" dirty="0">
+                <a:solidFill>
+                  <a:srgbClr val="12101F"/>
+                </a:solidFill>
+                <a:latin typeface="맑은 고딕" pitchFamily="34" charset="0"/>
+                <a:ea typeface="맑은 고딕" pitchFamily="34" charset="-122"/>
+                <a:cs typeface="맑은 고딕" pitchFamily="34" charset="-120"/>
+              </a:rPr>
+              <a:t>2,300</a:t>
+            </a:r>
+            <a:pPr algn="r" indent="0" marL="0">
+              <a:buNone/>
+            </a:pPr>
+            <a:r>
+              <a:rPr lang="en-US" sz="880" dirty="0">
+                <a:solidFill>
+                  <a:srgbClr val="6E6885"/>
+                </a:solidFill>
+                <a:latin typeface="맑은 고딕" pitchFamily="34" charset="0"/>
+                <a:ea typeface="맑은 고딕" pitchFamily="34" charset="-122"/>
+                <a:cs typeface="맑은 고딕" pitchFamily="34" charset="-120"/>
+              </a:rPr>
+              <a:t> 만원</a:t>
+            </a:r>
+            <a:endParaRPr lang="en-US" sz="1250" dirty="0"/>
+          </a:p>
+        </p:txBody>
+      </p:sp>
+      <p:sp>
+        <p:nvSpPr>
+          <p:cNvPr id="26" name="Text 24"/>
+          <p:cNvSpPr/>
+          <p:nvPr/>
+        </p:nvSpPr>
+        <p:spPr>
+          <a:xfrm>
+            <a:off x="5047488" y="3931920"/>
+            <a:ext cx="914400" cy="365760"/>
+          </a:xfrm>
+          <a:prstGeom prst="rect">
+            <a:avLst/>
+          </a:prstGeom>
+          <a:noFill/>
+          <a:ln/>
+        </p:spPr>
+        <p:txBody>
+          <a:bodyPr wrap="square" lIns="0" tIns="0" rIns="0" bIns="0" rtlCol="0" anchor="ctr"/>
+          <a:lstStyle/>
+          <a:p>
+            <a:pPr indent="0" marL="0">
+              <a:buNone/>
+            </a:pPr>
+            <a:r>
+              <a:rPr lang="en-US" sz="960" b="1" dirty="0">
+                <a:solidFill>
+                  <a:srgbClr val="3A3550"/>
+                </a:solidFill>
+                <a:latin typeface="맑은 고딕" pitchFamily="34" charset="0"/>
+                <a:ea typeface="맑은 고딕" pitchFamily="34" charset="-122"/>
+                <a:cs typeface="맑은 고딕" pitchFamily="34" charset="-120"/>
+              </a:rPr>
+              <a:t>24개월</a:t>
+            </a:r>
+            <a:endParaRPr lang="en-US" sz="960" dirty="0"/>
+          </a:p>
+        </p:txBody>
+      </p:sp>
+      <p:sp>
+        <p:nvSpPr>
+          <p:cNvPr id="27" name="Shape 25"/>
+          <p:cNvSpPr/>
+          <p:nvPr/>
+        </p:nvSpPr>
+        <p:spPr>
+          <a:xfrm>
+            <a:off x="6007608" y="4014216"/>
+            <a:ext cx="4428439" cy="201168"/>
+          </a:xfrm>
+          <a:prstGeom prst="roundRect">
+            <a:avLst>
+              <a:gd name="adj" fmla="val 9091"/>
+            </a:avLst>
+          </a:prstGeom>
+          <a:solidFill>
+            <a:srgbClr val="F6F4FC"/>
+          </a:solidFill>
+          <a:ln w="12700">
+            <a:solidFill>
+              <a:srgbClr val="F6F4FC"/>
+            </a:solidFill>
+            <a:prstDash val="solid"/>
+          </a:ln>
+        </p:spPr>
+      </p:sp>
+      <p:sp>
+        <p:nvSpPr>
+          <p:cNvPr id="28" name="Shape 26"/>
+          <p:cNvSpPr/>
+          <p:nvPr/>
+        </p:nvSpPr>
+        <p:spPr>
+          <a:xfrm>
+            <a:off x="6007608" y="4014216"/>
+            <a:ext cx="3077390" cy="201168"/>
+          </a:xfrm>
+          <a:prstGeom prst="roundRect">
+            <a:avLst>
+              <a:gd name="adj" fmla="val 9091"/>
+            </a:avLst>
+          </a:prstGeom>
+          <a:solidFill>
+            <a:srgbClr val="5B3DF5"/>
+          </a:solidFill>
+          <a:ln w="12700">
+            <a:solidFill>
+              <a:srgbClr val="333333"/>
+            </a:solidFill>
+            <a:prstDash val="solid"/>
+          </a:ln>
+        </p:spPr>
+      </p:sp>
+      <p:sp>
+        <p:nvSpPr>
+          <p:cNvPr id="29" name="Text 27"/>
+          <p:cNvSpPr/>
+          <p:nvPr/>
+        </p:nvSpPr>
+        <p:spPr>
+          <a:xfrm>
+            <a:off x="10481767" y="3931920"/>
+            <a:ext cx="1143000" cy="365760"/>
+          </a:xfrm>
+          <a:prstGeom prst="rect">
+            <a:avLst/>
+          </a:prstGeom>
+          <a:noFill/>
+          <a:ln/>
+        </p:spPr>
+        <p:txBody>
+          <a:bodyPr wrap="square" lIns="0" tIns="0" rIns="0" bIns="0" rtlCol="0" anchor="ctr"/>
+          <a:lstStyle/>
+          <a:p>
+            <a:pPr algn="r" indent="0" marL="0">
+              <a:buNone/>
+            </a:pPr>
+            <a:r>
+              <a:rPr lang="en-US" sz="1250" b="1" dirty="0">
+                <a:solidFill>
+                  <a:srgbClr val="12101F"/>
+                </a:solidFill>
+                <a:latin typeface="맑은 고딕" pitchFamily="34" charset="0"/>
+                <a:ea typeface="맑은 고딕" pitchFamily="34" charset="-122"/>
+                <a:cs typeface="맑은 고딕" pitchFamily="34" charset="-120"/>
+              </a:rPr>
+              <a:t>4,100</a:t>
+            </a:r>
+            <a:pPr algn="r" indent="0" marL="0">
+              <a:buNone/>
+            </a:pPr>
+            <a:r>
+              <a:rPr lang="en-US" sz="880" dirty="0">
+                <a:solidFill>
+                  <a:srgbClr val="6E6885"/>
+                </a:solidFill>
+                <a:latin typeface="맑은 고딕" pitchFamily="34" charset="0"/>
+                <a:ea typeface="맑은 고딕" pitchFamily="34" charset="-122"/>
+                <a:cs typeface="맑은 고딕" pitchFamily="34" charset="-120"/>
+              </a:rPr>
+              <a:t> 만원</a:t>
+            </a:r>
+            <a:endParaRPr lang="en-US" sz="1250" dirty="0"/>
+          </a:p>
+        </p:txBody>
+      </p:sp>
+      <p:sp>
+        <p:nvSpPr>
+          <p:cNvPr id="30" name="Text 28"/>
+          <p:cNvSpPr/>
+          <p:nvPr/>
+        </p:nvSpPr>
+        <p:spPr>
+          <a:xfrm>
+            <a:off x="5047488" y="4535424"/>
+            <a:ext cx="914400" cy="365760"/>
+          </a:xfrm>
+          <a:prstGeom prst="rect">
+            <a:avLst/>
+          </a:prstGeom>
+          <a:noFill/>
+          <a:ln/>
+        </p:spPr>
+        <p:txBody>
+          <a:bodyPr wrap="square" lIns="0" tIns="0" rIns="0" bIns="0" rtlCol="0" anchor="ctr"/>
+          <a:lstStyle/>
+          <a:p>
+            <a:pPr indent="0" marL="0">
+              <a:buNone/>
+            </a:pPr>
+            <a:r>
+              <a:rPr lang="en-US" sz="960" b="1" dirty="0">
+                <a:solidFill>
+                  <a:srgbClr val="3A3550"/>
+                </a:solidFill>
+                <a:latin typeface="맑은 고딕" pitchFamily="34" charset="0"/>
+                <a:ea typeface="맑은 고딕" pitchFamily="34" charset="-122"/>
+                <a:cs typeface="맑은 고딕" pitchFamily="34" charset="-120"/>
+              </a:rPr>
+              <a:t>36개월</a:t>
+            </a:r>
+            <a:endParaRPr lang="en-US" sz="960" dirty="0"/>
+          </a:p>
+        </p:txBody>
+      </p:sp>
+      <p:sp>
+        <p:nvSpPr>
+          <p:cNvPr id="31" name="Shape 29"/>
+          <p:cNvSpPr/>
+          <p:nvPr/>
+        </p:nvSpPr>
+        <p:spPr>
+          <a:xfrm>
+            <a:off x="6007608" y="4617720"/>
+            <a:ext cx="4428439" cy="201168"/>
+          </a:xfrm>
+          <a:prstGeom prst="roundRect">
+            <a:avLst>
+              <a:gd name="adj" fmla="val 9091"/>
+            </a:avLst>
+          </a:prstGeom>
+          <a:solidFill>
+            <a:srgbClr val="F6F4FC"/>
+          </a:solidFill>
+          <a:ln w="12700">
+            <a:solidFill>
+              <a:srgbClr val="F6F4FC"/>
+            </a:solidFill>
+            <a:prstDash val="solid"/>
+          </a:ln>
+        </p:spPr>
+      </p:sp>
+      <p:sp>
+        <p:nvSpPr>
+          <p:cNvPr id="32" name="Shape 30"/>
+          <p:cNvSpPr/>
+          <p:nvPr/>
+        </p:nvSpPr>
+        <p:spPr>
+          <a:xfrm>
+            <a:off x="6007608" y="4617720"/>
+            <a:ext cx="4428439" cy="201168"/>
+          </a:xfrm>
+          <a:prstGeom prst="roundRect">
+            <a:avLst>
+              <a:gd name="adj" fmla="val 9091"/>
+            </a:avLst>
+          </a:prstGeom>
+          <a:solidFill>
+            <a:srgbClr val="241A5C"/>
+          </a:solidFill>
+          <a:ln w="12700">
+            <a:solidFill>
+              <a:srgbClr val="333333"/>
+            </a:solidFill>
+            <a:prstDash val="solid"/>
+          </a:ln>
+        </p:spPr>
+      </p:sp>
+      <p:sp>
+        <p:nvSpPr>
+          <p:cNvPr id="33" name="Text 31"/>
+          <p:cNvSpPr/>
+          <p:nvPr/>
+        </p:nvSpPr>
+        <p:spPr>
+          <a:xfrm>
+            <a:off x="10481767" y="4535424"/>
+            <a:ext cx="1143000" cy="365760"/>
+          </a:xfrm>
+          <a:prstGeom prst="rect">
+            <a:avLst/>
+          </a:prstGeom>
+          <a:noFill/>
+          <a:ln/>
+        </p:spPr>
+        <p:txBody>
+          <a:bodyPr wrap="square" lIns="0" tIns="0" rIns="0" bIns="0" rtlCol="0" anchor="ctr"/>
+          <a:lstStyle/>
+          <a:p>
+            <a:pPr algn="r" indent="0" marL="0">
+              <a:buNone/>
+            </a:pPr>
+            <a:r>
+              <a:rPr lang="en-US" sz="1250" b="1" dirty="0">
+                <a:solidFill>
+                  <a:srgbClr val="241A5C"/>
+                </a:solidFill>
+                <a:latin typeface="맑은 고딕" pitchFamily="34" charset="0"/>
+                <a:ea typeface="맑은 고딕" pitchFamily="34" charset="-122"/>
+                <a:cs typeface="맑은 고딕" pitchFamily="34" charset="-120"/>
+              </a:rPr>
+              <a:t>5,900</a:t>
+            </a:r>
+            <a:pPr algn="r" indent="0" marL="0">
+              <a:buNone/>
+            </a:pPr>
+            <a:r>
+              <a:rPr lang="en-US" sz="880" dirty="0">
+                <a:solidFill>
+                  <a:srgbClr val="6E6885"/>
+                </a:solidFill>
+                <a:latin typeface="맑은 고딕" pitchFamily="34" charset="0"/>
+                <a:ea typeface="맑은 고딕" pitchFamily="34" charset="-122"/>
+                <a:cs typeface="맑은 고딕" pitchFamily="34" charset="-120"/>
+              </a:rPr>
+              <a:t> 만원</a:t>
+            </a:r>
+            <a:endParaRPr lang="en-US" sz="1250" dirty="0"/>
+          </a:p>
+        </p:txBody>
+      </p:sp>
+      <p:sp>
+        <p:nvSpPr>
+          <p:cNvPr id="34" name="Text 32"/>
+          <p:cNvSpPr/>
+          <p:nvPr/>
+        </p:nvSpPr>
+        <p:spPr>
+          <a:xfrm>
+            <a:off x="5047488" y="5175504"/>
+            <a:ext cx="6577279" cy="274320"/>
+          </a:xfrm>
+          <a:prstGeom prst="rect">
+            <a:avLst/>
+          </a:prstGeom>
+          <a:noFill/>
+          <a:ln/>
+        </p:spPr>
+        <p:txBody>
+          <a:bodyPr wrap="square" lIns="0" tIns="0" rIns="0" bIns="0" rtlCol="0" anchor="ctr"/>
+          <a:lstStyle/>
+          <a:p>
+            <a:pPr indent="0" marL="0">
+              <a:buNone/>
+            </a:pPr>
+            <a:r>
+              <a:rPr lang="en-US" sz="940" dirty="0">
+                <a:solidFill>
+                  <a:srgbClr val="3A3550"/>
+                </a:solidFill>
+                <a:latin typeface="맑은 고딕" pitchFamily="34" charset="0"/>
+                <a:ea typeface="맑은 고딕" pitchFamily="34" charset="-122"/>
+                <a:cs typeface="맑은 고딕" pitchFamily="34" charset="-120"/>
+              </a:rPr>
+              <a:t>성공보수는 1회성이고, 로열티는 매월 반복됩니다. 출점이 쌓일수록 격차는 벌어집니다.</a:t>
+            </a:r>
+            <a:endParaRPr lang="en-US" sz="940" dirty="0"/>
+          </a:p>
+        </p:txBody>
+      </p:sp>
+      <p:sp>
+        <p:nvSpPr>
+          <p:cNvPr id="35" name="Shape 33"/>
+          <p:cNvSpPr/>
+          <p:nvPr/>
+        </p:nvSpPr>
+        <p:spPr>
+          <a:xfrm>
+            <a:off x="566928" y="5504688"/>
+            <a:ext cx="11057839" cy="603504"/>
+          </a:xfrm>
+          <a:prstGeom prst="roundRect">
+            <a:avLst>
+              <a:gd name="adj" fmla="val 9091"/>
+            </a:avLst>
+          </a:prstGeom>
+          <a:solidFill>
+            <a:srgbClr val="12101F"/>
+          </a:solidFill>
+          <a:ln w="12700">
+            <a:solidFill>
+              <a:srgbClr val="12101F"/>
+            </a:solidFill>
+            <a:prstDash val="solid"/>
+          </a:ln>
+        </p:spPr>
+      </p:sp>
+      <p:sp>
+        <p:nvSpPr>
+          <p:cNvPr id="36" name="Text 34"/>
+          <p:cNvSpPr/>
+          <p:nvPr/>
+        </p:nvSpPr>
+        <p:spPr>
+          <a:xfrm>
+            <a:off x="969264" y="5504688"/>
+            <a:ext cx="10253167" cy="603504"/>
+          </a:xfrm>
+          <a:prstGeom prst="rect">
+            <a:avLst/>
+          </a:prstGeom>
+          <a:noFill/>
+          <a:ln/>
+        </p:spPr>
+        <p:txBody>
+          <a:bodyPr wrap="square" lIns="0" tIns="0" rIns="0" bIns="0" rtlCol="0" anchor="ctr"/>
+          <a:lstStyle/>
+          <a:p>
+            <a:pPr indent="0" marL="0">
+              <a:buNone/>
+            </a:pPr>
+            <a:r>
+              <a:rPr lang="en-US" sz="1350" b="1" dirty="0">
+                <a:solidFill>
+                  <a:srgbClr val="FFFFFF"/>
+                </a:solidFill>
+                <a:latin typeface="맑은 고딕" pitchFamily="34" charset="0"/>
+                <a:ea typeface="맑은 고딕" pitchFamily="34" charset="-122"/>
+                <a:cs typeface="맑은 고딕" pitchFamily="34" charset="-120"/>
+              </a:rPr>
+              <a:t>본사가 부담하는 것은 </a:t>
+            </a:r>
+            <a:pPr indent="0" marL="0">
+              <a:buNone/>
+            </a:pPr>
+            <a:r>
+              <a:rPr lang="en-US" sz="1350" b="1" dirty="0">
+                <a:solidFill>
+                  <a:srgbClr val="C9B8FF"/>
+                </a:solidFill>
+                <a:latin typeface="맑은 고딕" pitchFamily="34" charset="0"/>
+                <a:ea typeface="맑은 고딕" pitchFamily="34" charset="-122"/>
+                <a:cs typeface="맑은 고딕" pitchFamily="34" charset="-120"/>
+              </a:rPr>
+              <a:t>가맹비의 일부</a:t>
+            </a:r>
+            <a:pPr indent="0" marL="0">
+              <a:buNone/>
+            </a:pPr>
+            <a:r>
+              <a:rPr lang="en-US" sz="1350" b="1" dirty="0">
+                <a:solidFill>
+                  <a:srgbClr val="FFFFFF"/>
+                </a:solidFill>
+                <a:latin typeface="맑은 고딕" pitchFamily="34" charset="0"/>
+                <a:ea typeface="맑은 고딕" pitchFamily="34" charset="-122"/>
+                <a:cs typeface="맑은 고딕" pitchFamily="34" charset="-120"/>
+              </a:rPr>
+              <a:t>이고, 얻는 것은 </a:t>
+            </a:r>
+            <a:pPr indent="0" marL="0">
+              <a:buNone/>
+            </a:pPr>
+            <a:r>
+              <a:rPr lang="en-US" sz="1350" b="1" dirty="0">
+                <a:solidFill>
+                  <a:srgbClr val="C9B8FF"/>
+                </a:solidFill>
+                <a:latin typeface="맑은 고딕" pitchFamily="34" charset="0"/>
+                <a:ea typeface="맑은 고딕" pitchFamily="34" charset="-122"/>
+                <a:cs typeface="맑은 고딕" pitchFamily="34" charset="-120"/>
+              </a:rPr>
+              <a:t>매장 하나의 생애 매출</a:t>
+            </a:r>
+            <a:pPr indent="0" marL="0">
+              <a:buNone/>
+            </a:pPr>
+            <a:r>
+              <a:rPr lang="en-US" sz="1350" b="1" dirty="0">
+                <a:solidFill>
+                  <a:srgbClr val="FFFFFF"/>
+                </a:solidFill>
+                <a:latin typeface="맑은 고딕" pitchFamily="34" charset="0"/>
+                <a:ea typeface="맑은 고딕" pitchFamily="34" charset="-122"/>
+                <a:cs typeface="맑은 고딕" pitchFamily="34" charset="-120"/>
+              </a:rPr>
+              <a:t>입니다.</a:t>
+            </a:r>
+            <a:endParaRPr lang="en-US" sz="1350" dirty="0"/>
+          </a:p>
+        </p:txBody>
+      </p:sp>
+      <p:sp>
+        <p:nvSpPr>
+          <p:cNvPr id="37" name="Text 35"/>
+          <p:cNvSpPr/>
+          <p:nvPr/>
+        </p:nvSpPr>
+        <p:spPr>
+          <a:xfrm>
+            <a:off x="566928" y="6199632"/>
+            <a:ext cx="9601200" cy="219456"/>
+          </a:xfrm>
+          <a:prstGeom prst="rect">
+            <a:avLst/>
+          </a:prstGeom>
+          <a:noFill/>
+          <a:ln/>
+        </p:spPr>
+        <p:txBody>
+          <a:bodyPr wrap="square" lIns="0" tIns="0" rIns="0" bIns="0" rtlCol="0" anchor="ctr"/>
+          <a:lstStyle/>
+          <a:p>
+            <a:pPr indent="0" marL="0">
+              <a:buNone/>
+            </a:pPr>
+            <a:r>
+              <a:rPr lang="en-US" sz="760" dirty="0">
+                <a:solidFill>
+                  <a:srgbClr val="6E6885"/>
+                </a:solidFill>
+                <a:latin typeface="맑은 고딕" pitchFamily="34" charset="0"/>
+                <a:ea typeface="맑은 고딕" pitchFamily="34" charset="-122"/>
+                <a:cs typeface="맑은 고딕" pitchFamily="34" charset="-120"/>
+              </a:rPr>
+              <a:t>※ 러너펍 공개 가맹 안내 기준(가맹비 1,500만원 / 월 로열티 150만원·부가세 별도) 시뮬레이션이며, 실제 조건은 본사 정책에 따릅니다.</a:t>
+            </a:r>
+            <a:endParaRPr lang="en-US" sz="760" dirty="0"/>
+          </a:p>
+        </p:txBody>
+      </p:sp>
+      <p:sp>
+        <p:nvSpPr>
+          <p:cNvPr id="38" name="Text 36"/>
+          <p:cNvSpPr/>
+          <p:nvPr/>
+        </p:nvSpPr>
+        <p:spPr>
+          <a:xfrm>
+            <a:off x="10710367" y="6199632"/>
+            <a:ext cx="914400" cy="219456"/>
+          </a:xfrm>
+          <a:prstGeom prst="rect">
+            <a:avLst/>
+          </a:prstGeom>
+          <a:noFill/>
+          <a:ln/>
+        </p:spPr>
+        <p:txBody>
+          <a:bodyPr wrap="square" lIns="0" tIns="0" rIns="0" bIns="0" rtlCol="0" anchor="ctr"/>
+          <a:lstStyle/>
+          <a:p>
+            <a:pPr algn="r" indent="0" marL="0">
+              <a:buNone/>
+            </a:pPr>
+            <a:r>
+              <a:rPr lang="en-US" sz="800" b="1" dirty="0">
+                <a:solidFill>
+                  <a:srgbClr val="6E6885"/>
+                </a:solidFill>
+                <a:latin typeface="맑은 고딕" pitchFamily="34" charset="0"/>
+                <a:ea typeface="맑은 고딕" pitchFamily="34" charset="-122"/>
+                <a:cs typeface="맑은 고딕" pitchFamily="34" charset="-120"/>
+              </a:rPr>
+              <a:t>07</a:t>
+            </a:r>
+            <a:endParaRPr lang="en-US" sz="800" dirty="0"/>
+          </a:p>
+        </p:txBody>
+      </p:sp>
+    </p:spTree>
+  </p:cSld>
+  <p:clrMapOvr>
+    <a:masterClrMapping/>
+  </p:clrMapOvr>
+</p:sld>
+</file>
+
+<file path=ppt/slides/slide8.xml><?xml version="1.0" encoding="utf-8"?>
+<p:sld xmlns:a="http://schemas.openxmlformats.org/drawingml/2006/main" xmlns:r="http://schemas.openxmlformats.org/officeDocument/2006/relationships" xmlns:p="http://schemas.openxmlformats.org/presentationml/2006/main">
+  <p:cSld name="Slide 8">
     <p:bg>
       <p:bgPr>
         <a:blipFill dpi="0" rotWithShape="1">
@@ -10100,7 +11703,7 @@
                 <a:ea typeface="맑은 고딕" pitchFamily="34" charset="-122"/>
                 <a:cs typeface="맑은 고딕" pitchFamily="34" charset="-120"/>
               </a:rPr>
-              <a:t>06</a:t>
+              <a:t>07</a:t>
             </a:r>
             <a:endParaRPr lang="en-US" sz="1100" dirty="0"/>
           </a:p>
